--- a/dist/gstack-tutorial-4_EN.pptx
+++ b/dist/gstack-tutorial-4_EN.pptx
@@ -25,6 +25,10 @@
     <p:sldId id="273" r:id="rId24"/>
     <p:sldId id="274" r:id="rId25"/>
     <p:sldId id="275" r:id="rId26"/>
+    <p:sldId id="276" r:id="rId27"/>
+    <p:sldId id="277" r:id="rId28"/>
+    <p:sldId id="278" r:id="rId29"/>
+    <p:sldId id="279" r:id="rId30"/>
   </p:sldIdLst>
   <p:sldSz cx="12191695" cy="6858000" type="screen4x3"/>
   <p:notesSz cx="6858000" cy="9144000"/>
@@ -12596,6 +12600,2794 @@
                 <a:cs typeface="Microsoft YaHei"/>
               </a:rPr>
               <a:t>19</a:t>
+            </a:r>
+          </a:p>
+        </p:txBody>
+      </p:sp>
+    </p:spTree>
+  </p:cSld>
+  <p:clrMapOvr>
+    <a:masterClrMapping/>
+  </p:clrMapOvr>
+</p:sld>
+</file>
+
+<file path=ppt/slides/slide21.xml><?xml version="1.0" encoding="utf-8"?>
+<p:sld xmlns:a="http://schemas.openxmlformats.org/drawingml/2006/main" xmlns:p="http://schemas.openxmlformats.org/presentationml/2006/main" xmlns:r="http://schemas.openxmlformats.org/officeDocument/2006/relationships">
+  <p:cSld>
+    <p:spTree>
+      <p:nvGrpSpPr>
+        <p:cNvPr id="1" name=""/>
+        <p:cNvGrpSpPr/>
+        <p:nvPr/>
+      </p:nvGrpSpPr>
+      <p:grpSpPr/>
+      <p:sp>
+        <p:nvSpPr>
+          <p:cNvPr id="2" name="TextBox 1"/>
+          <p:cNvSpPr txBox="1"/>
+          <p:nvPr/>
+        </p:nvSpPr>
+        <p:spPr>
+          <a:xfrm>
+            <a:off x="685800" y="457200"/>
+            <a:ext cx="10820095" cy="274320"/>
+          </a:xfrm>
+          <a:prstGeom prst="rect">
+            <a:avLst/>
+          </a:prstGeom>
+          <a:noFill/>
+        </p:spPr>
+        <p:txBody>
+          <a:bodyPr wrap="square" anchor="t" lIns="0" rIns="0" tIns="0" bIns="0">
+            <a:noAutofit/>
+          </a:bodyPr>
+          <a:lstStyle/>
+          <a:p>
+            <a:pPr algn="l"/>
+            <a:r>
+              <a:rPr sz="1600" b="1" i="0">
+                <a:solidFill>
+                  <a:srgbClr val="1F4E78"/>
+                </a:solidFill>
+                <a:latin typeface="Calibri"/>
+                <a:ea typeface="Microsoft YaHei"/>
+                <a:cs typeface="Microsoft YaHei"/>
+              </a:rPr>
+              <a:t>TUTORIAL 4.1 — PRODUCT DESIGN REVIEW</a:t>
+            </a:r>
+          </a:p>
+        </p:txBody>
+      </p:sp>
+      <p:sp>
+        <p:nvSpPr>
+          <p:cNvPr id="3" name="TextBox 2"/>
+          <p:cNvSpPr txBox="1"/>
+          <p:nvPr/>
+        </p:nvSpPr>
+        <p:spPr>
+          <a:xfrm>
+            <a:off x="685800" y="786384"/>
+            <a:ext cx="10820095" cy="1037335"/>
+          </a:xfrm>
+          <a:prstGeom prst="rect">
+            <a:avLst/>
+          </a:prstGeom>
+          <a:noFill/>
+        </p:spPr>
+        <p:txBody>
+          <a:bodyPr wrap="square" anchor="t" lIns="0" rIns="0" tIns="0" bIns="0">
+            <a:noAutofit/>
+          </a:bodyPr>
+          <a:lstStyle/>
+          <a:p>
+            <a:pPr algn="l">
+              <a:lnSpc>
+                <a:spcPct val="108000"/>
+              </a:lnSpc>
+            </a:pPr>
+            <a:r>
+              <a:rPr sz="3200" b="1" i="0">
+                <a:solidFill>
+                  <a:srgbClr val="1F4E78"/>
+                </a:solidFill>
+                <a:latin typeface="Calibri"/>
+                <a:ea typeface="Microsoft YaHei"/>
+                <a:cs typeface="Microsoft YaHei"/>
+              </a:rPr>
+              <a:t>A working product that still read as an engineering prototype</a:t>
+            </a:r>
+          </a:p>
+        </p:txBody>
+      </p:sp>
+      <p:sp>
+        <p:nvSpPr>
+          <p:cNvPr id="4" name="Rectangle 3"/>
+          <p:cNvSpPr/>
+          <p:nvPr/>
+        </p:nvSpPr>
+        <p:spPr>
+          <a:xfrm>
+            <a:off x="685800" y="1933447"/>
+            <a:ext cx="10820095" cy="9525"/>
+          </a:xfrm>
+          <a:prstGeom prst="rect">
+            <a:avLst/>
+          </a:prstGeom>
+          <a:solidFill>
+            <a:srgbClr val="1F4E78"/>
+          </a:solidFill>
+          <a:ln>
+            <a:noFill/>
+          </a:ln>
+          <a:effectLst/>
+        </p:spPr>
+        <p:style>
+          <a:lnRef idx="1">
+            <a:schemeClr val="accent1"/>
+          </a:lnRef>
+          <a:fillRef idx="3">
+            <a:schemeClr val="accent1"/>
+          </a:fillRef>
+          <a:effectRef idx="2">
+            <a:schemeClr val="accent1"/>
+          </a:effectRef>
+          <a:fontRef idx="minor">
+            <a:schemeClr val="lt1"/>
+          </a:fontRef>
+        </p:style>
+        <p:txBody>
+          <a:bodyPr rtlCol="0" anchor="ctr"/>
+          <a:lstStyle/>
+          <a:p>
+            <a:pPr algn="ctr"/>
+          </a:p>
+        </p:txBody>
+      </p:sp>
+      <p:sp>
+        <p:nvSpPr>
+          <p:cNvPr id="5" name="TextBox 4"/>
+          <p:cNvSpPr txBox="1"/>
+          <p:nvPr/>
+        </p:nvSpPr>
+        <p:spPr>
+          <a:xfrm>
+            <a:off x="685800" y="2079751"/>
+            <a:ext cx="10820095" cy="386842"/>
+          </a:xfrm>
+          <a:prstGeom prst="rect">
+            <a:avLst/>
+          </a:prstGeom>
+          <a:noFill/>
+        </p:spPr>
+        <p:txBody>
+          <a:bodyPr wrap="square" anchor="t" lIns="0" rIns="0" tIns="0" bIns="0">
+            <a:noAutofit/>
+          </a:bodyPr>
+          <a:lstStyle/>
+          <a:p>
+            <a:pPr algn="l">
+              <a:lnSpc>
+                <a:spcPct val="130000"/>
+              </a:lnSpc>
+            </a:pPr>
+            <a:r>
+              <a:rPr sz="1900" b="0" i="1">
+                <a:solidFill>
+                  <a:srgbClr val="595959"/>
+                </a:solidFill>
+                <a:latin typeface="Calibri"/>
+                <a:ea typeface="Microsoft YaHei"/>
+                <a:cs typeface="Microsoft YaHei"/>
+              </a:rPr>
+              <a:t>Shipped and functionally correct is a different claim from trustworthy at first glance.</a:t>
+            </a:r>
+          </a:p>
+        </p:txBody>
+      </p:sp>
+      <p:sp>
+        <p:nvSpPr>
+          <p:cNvPr id="6" name="Rectangle 5"/>
+          <p:cNvSpPr/>
+          <p:nvPr/>
+        </p:nvSpPr>
+        <p:spPr>
+          <a:xfrm>
+            <a:off x="685800" y="2594609"/>
+            <a:ext cx="10820095" cy="446277"/>
+          </a:xfrm>
+          <a:prstGeom prst="rect">
+            <a:avLst/>
+          </a:prstGeom>
+          <a:solidFill>
+            <a:srgbClr val="1F4E78"/>
+          </a:solidFill>
+          <a:ln>
+            <a:noFill/>
+          </a:ln>
+          <a:effectLst/>
+        </p:spPr>
+        <p:style>
+          <a:lnRef idx="1">
+            <a:schemeClr val="accent1"/>
+          </a:lnRef>
+          <a:fillRef idx="3">
+            <a:schemeClr val="accent1"/>
+          </a:fillRef>
+          <a:effectRef idx="2">
+            <a:schemeClr val="accent1"/>
+          </a:effectRef>
+          <a:fontRef idx="minor">
+            <a:schemeClr val="lt1"/>
+          </a:fontRef>
+        </p:style>
+        <p:txBody>
+          <a:bodyPr rtlCol="0" anchor="ctr"/>
+          <a:lstStyle/>
+          <a:p>
+            <a:pPr algn="ctr"/>
+          </a:p>
+        </p:txBody>
+      </p:sp>
+      <p:sp>
+        <p:nvSpPr>
+          <p:cNvPr id="7" name="TextBox 6"/>
+          <p:cNvSpPr txBox="1"/>
+          <p:nvPr/>
+        </p:nvSpPr>
+        <p:spPr>
+          <a:xfrm>
+            <a:off x="813816" y="2667761"/>
+            <a:ext cx="4823808" cy="336549"/>
+          </a:xfrm>
+          <a:prstGeom prst="rect">
+            <a:avLst/>
+          </a:prstGeom>
+          <a:noFill/>
+        </p:spPr>
+        <p:txBody>
+          <a:bodyPr wrap="square" anchor="t" lIns="0" rIns="0" tIns="0" bIns="0">
+            <a:noAutofit/>
+          </a:bodyPr>
+          <a:lstStyle/>
+          <a:p>
+            <a:pPr algn="l"/>
+            <a:r>
+              <a:rPr sz="1700" b="1" i="0">
+                <a:solidFill>
+                  <a:srgbClr val="FFFFFF"/>
+                </a:solidFill>
+                <a:latin typeface="Calibri"/>
+                <a:ea typeface="Microsoft YaHei"/>
+                <a:cs typeface="Microsoft YaHei"/>
+              </a:rPr>
+              <a:t>Gap found</a:t>
+            </a:r>
+          </a:p>
+        </p:txBody>
+      </p:sp>
+      <p:sp>
+        <p:nvSpPr>
+          <p:cNvPr id="8" name="TextBox 7"/>
+          <p:cNvSpPr txBox="1"/>
+          <p:nvPr/>
+        </p:nvSpPr>
+        <p:spPr>
+          <a:xfrm>
+            <a:off x="5857080" y="2667761"/>
+            <a:ext cx="5557374" cy="336549"/>
+          </a:xfrm>
+          <a:prstGeom prst="rect">
+            <a:avLst/>
+          </a:prstGeom>
+          <a:noFill/>
+        </p:spPr>
+        <p:txBody>
+          <a:bodyPr wrap="square" anchor="t" lIns="0" rIns="0" tIns="0" bIns="0">
+            <a:noAutofit/>
+          </a:bodyPr>
+          <a:lstStyle/>
+          <a:p>
+            <a:pPr algn="l"/>
+            <a:r>
+              <a:rPr sz="1700" b="1" i="0">
+                <a:solidFill>
+                  <a:srgbClr val="FFFFFF"/>
+                </a:solidFill>
+                <a:latin typeface="Calibri"/>
+                <a:ea typeface="Microsoft YaHei"/>
+                <a:cs typeface="Microsoft YaHei"/>
+              </a:rPr>
+              <a:t>Fix shipped</a:t>
+            </a:r>
+          </a:p>
+        </p:txBody>
+      </p:sp>
+      <p:sp>
+        <p:nvSpPr>
+          <p:cNvPr id="9" name="TextBox 8"/>
+          <p:cNvSpPr txBox="1"/>
+          <p:nvPr/>
+        </p:nvSpPr>
+        <p:spPr>
+          <a:xfrm>
+            <a:off x="813816" y="3114038"/>
+            <a:ext cx="4823808" cy="656336"/>
+          </a:xfrm>
+          <a:prstGeom prst="rect">
+            <a:avLst/>
+          </a:prstGeom>
+          <a:noFill/>
+        </p:spPr>
+        <p:txBody>
+          <a:bodyPr wrap="square" anchor="t" lIns="0" rIns="0" tIns="0" bIns="0">
+            <a:noAutofit/>
+          </a:bodyPr>
+          <a:lstStyle/>
+          <a:p>
+            <a:pPr algn="l">
+              <a:lnSpc>
+                <a:spcPct val="115000"/>
+              </a:lnSpc>
+            </a:pPr>
+            <a:r>
+              <a:rPr sz="2000" b="0" i="0">
+                <a:solidFill>
+                  <a:srgbClr val="000000"/>
+                </a:solidFill>
+                <a:latin typeface="Calibri"/>
+                <a:ea typeface="Microsoft YaHei"/>
+                <a:cs typeface="Microsoft YaHei"/>
+              </a:rPr>
+              <a:t>No header or navigation</a:t>
+            </a:r>
+          </a:p>
+        </p:txBody>
+      </p:sp>
+      <p:sp>
+        <p:nvSpPr>
+          <p:cNvPr id="10" name="TextBox 9"/>
+          <p:cNvSpPr txBox="1"/>
+          <p:nvPr/>
+        </p:nvSpPr>
+        <p:spPr>
+          <a:xfrm>
+            <a:off x="5857080" y="3114038"/>
+            <a:ext cx="5557374" cy="656336"/>
+          </a:xfrm>
+          <a:prstGeom prst="rect">
+            <a:avLst/>
+          </a:prstGeom>
+          <a:noFill/>
+        </p:spPr>
+        <p:txBody>
+          <a:bodyPr wrap="square" anchor="t" lIns="0" rIns="0" tIns="0" bIns="0">
+            <a:noAutofit/>
+          </a:bodyPr>
+          <a:lstStyle/>
+          <a:p>
+            <a:pPr algn="l">
+              <a:lnSpc>
+                <a:spcPct val="115000"/>
+              </a:lnSpc>
+            </a:pPr>
+            <a:r>
+              <a:rPr sz="2000" b="0" i="0">
+                <a:solidFill>
+                  <a:srgbClr val="000000"/>
+                </a:solidFill>
+                <a:latin typeface="Calibri"/>
+                <a:ea typeface="Microsoft YaHei"/>
+                <a:cs typeface="Microsoft YaHei"/>
+              </a:rPr>
+              <a:t>Persistent header; Single Tweet / Thread now cross-linked</a:t>
+            </a:r>
+          </a:p>
+        </p:txBody>
+      </p:sp>
+      <p:sp>
+        <p:nvSpPr>
+          <p:cNvPr id="11" name="Rectangle 10"/>
+          <p:cNvSpPr/>
+          <p:nvPr/>
+        </p:nvSpPr>
+        <p:spPr>
+          <a:xfrm>
+            <a:off x="685800" y="3806950"/>
+            <a:ext cx="10820095" cy="9525"/>
+          </a:xfrm>
+          <a:prstGeom prst="rect">
+            <a:avLst/>
+          </a:prstGeom>
+          <a:solidFill>
+            <a:srgbClr val="D8DEE4"/>
+          </a:solidFill>
+          <a:ln>
+            <a:noFill/>
+          </a:ln>
+          <a:effectLst/>
+        </p:spPr>
+        <p:style>
+          <a:lnRef idx="1">
+            <a:schemeClr val="accent1"/>
+          </a:lnRef>
+          <a:fillRef idx="3">
+            <a:schemeClr val="accent1"/>
+          </a:fillRef>
+          <a:effectRef idx="2">
+            <a:schemeClr val="accent1"/>
+          </a:effectRef>
+          <a:fontRef idx="minor">
+            <a:schemeClr val="lt1"/>
+          </a:fontRef>
+        </p:style>
+        <p:txBody>
+          <a:bodyPr rtlCol="0" anchor="ctr"/>
+          <a:lstStyle/>
+          <a:p>
+            <a:pPr algn="ctr"/>
+          </a:p>
+        </p:txBody>
+      </p:sp>
+      <p:sp>
+        <p:nvSpPr>
+          <p:cNvPr id="12" name="Rectangle 11"/>
+          <p:cNvSpPr/>
+          <p:nvPr/>
+        </p:nvSpPr>
+        <p:spPr>
+          <a:xfrm>
+            <a:off x="685800" y="3806950"/>
+            <a:ext cx="10820095" cy="766064"/>
+          </a:xfrm>
+          <a:prstGeom prst="rect">
+            <a:avLst/>
+          </a:prstGeom>
+          <a:solidFill>
+            <a:srgbClr val="F2F2F2"/>
+          </a:solidFill>
+          <a:ln>
+            <a:noFill/>
+          </a:ln>
+          <a:effectLst/>
+        </p:spPr>
+        <p:style>
+          <a:lnRef idx="1">
+            <a:schemeClr val="accent1"/>
+          </a:lnRef>
+          <a:fillRef idx="3">
+            <a:schemeClr val="accent1"/>
+          </a:fillRef>
+          <a:effectRef idx="2">
+            <a:schemeClr val="accent1"/>
+          </a:effectRef>
+          <a:fontRef idx="minor">
+            <a:schemeClr val="lt1"/>
+          </a:fontRef>
+        </p:style>
+        <p:txBody>
+          <a:bodyPr rtlCol="0" anchor="ctr"/>
+          <a:lstStyle/>
+          <a:p>
+            <a:pPr algn="ctr"/>
+          </a:p>
+        </p:txBody>
+      </p:sp>
+      <p:sp>
+        <p:nvSpPr>
+          <p:cNvPr id="13" name="TextBox 12"/>
+          <p:cNvSpPr txBox="1"/>
+          <p:nvPr/>
+        </p:nvSpPr>
+        <p:spPr>
+          <a:xfrm>
+            <a:off x="813816" y="3880102"/>
+            <a:ext cx="4823808" cy="656336"/>
+          </a:xfrm>
+          <a:prstGeom prst="rect">
+            <a:avLst/>
+          </a:prstGeom>
+          <a:noFill/>
+        </p:spPr>
+        <p:txBody>
+          <a:bodyPr wrap="square" anchor="t" lIns="0" rIns="0" tIns="0" bIns="0">
+            <a:noAutofit/>
+          </a:bodyPr>
+          <a:lstStyle/>
+          <a:p>
+            <a:pPr algn="l">
+              <a:lnSpc>
+                <a:spcPct val="115000"/>
+              </a:lnSpc>
+            </a:pPr>
+            <a:r>
+              <a:rPr sz="2000" b="0" i="0">
+                <a:solidFill>
+                  <a:srgbClr val="000000"/>
+                </a:solidFill>
+                <a:latin typeface="Calibri"/>
+                <a:ea typeface="Microsoft YaHei"/>
+                <a:cs typeface="Microsoft YaHei"/>
+              </a:rPr>
+              <a:t>Plain, unstyled input</a:t>
+            </a:r>
+          </a:p>
+        </p:txBody>
+      </p:sp>
+      <p:sp>
+        <p:nvSpPr>
+          <p:cNvPr id="14" name="TextBox 13"/>
+          <p:cNvSpPr txBox="1"/>
+          <p:nvPr/>
+        </p:nvSpPr>
+        <p:spPr>
+          <a:xfrm>
+            <a:off x="5857080" y="3880102"/>
+            <a:ext cx="5557374" cy="656336"/>
+          </a:xfrm>
+          <a:prstGeom prst="rect">
+            <a:avLst/>
+          </a:prstGeom>
+          <a:noFill/>
+        </p:spPr>
+        <p:txBody>
+          <a:bodyPr wrap="square" anchor="t" lIns="0" rIns="0" tIns="0" bIns="0">
+            <a:noAutofit/>
+          </a:bodyPr>
+          <a:lstStyle/>
+          <a:p>
+            <a:pPr algn="l">
+              <a:lnSpc>
+                <a:spcPct val="115000"/>
+              </a:lnSpc>
+            </a:pPr>
+            <a:r>
+              <a:rPr sz="2000" b="0" i="0">
+                <a:solidFill>
+                  <a:srgbClr val="000000"/>
+                </a:solidFill>
+                <a:latin typeface="Calibri"/>
+                <a:ea typeface="Microsoft YaHei"/>
+                <a:cs typeface="Microsoft YaHei"/>
+              </a:rPr>
+              <a:t>Styled control, two-column preview + inspector layout</a:t>
+            </a:r>
+          </a:p>
+        </p:txBody>
+      </p:sp>
+      <p:sp>
+        <p:nvSpPr>
+          <p:cNvPr id="15" name="Rectangle 14"/>
+          <p:cNvSpPr/>
+          <p:nvPr/>
+        </p:nvSpPr>
+        <p:spPr>
+          <a:xfrm>
+            <a:off x="685800" y="4573014"/>
+            <a:ext cx="10820095" cy="9525"/>
+          </a:xfrm>
+          <a:prstGeom prst="rect">
+            <a:avLst/>
+          </a:prstGeom>
+          <a:solidFill>
+            <a:srgbClr val="D8DEE4"/>
+          </a:solidFill>
+          <a:ln>
+            <a:noFill/>
+          </a:ln>
+          <a:effectLst/>
+        </p:spPr>
+        <p:style>
+          <a:lnRef idx="1">
+            <a:schemeClr val="accent1"/>
+          </a:lnRef>
+          <a:fillRef idx="3">
+            <a:schemeClr val="accent1"/>
+          </a:fillRef>
+          <a:effectRef idx="2">
+            <a:schemeClr val="accent1"/>
+          </a:effectRef>
+          <a:fontRef idx="minor">
+            <a:schemeClr val="lt1"/>
+          </a:fontRef>
+        </p:style>
+        <p:txBody>
+          <a:bodyPr rtlCol="0" anchor="ctr"/>
+          <a:lstStyle/>
+          <a:p>
+            <a:pPr algn="ctr"/>
+          </a:p>
+        </p:txBody>
+      </p:sp>
+      <p:sp>
+        <p:nvSpPr>
+          <p:cNvPr id="16" name="TextBox 15"/>
+          <p:cNvSpPr txBox="1"/>
+          <p:nvPr/>
+        </p:nvSpPr>
+        <p:spPr>
+          <a:xfrm>
+            <a:off x="813816" y="4646166"/>
+            <a:ext cx="4823808" cy="346455"/>
+          </a:xfrm>
+          <a:prstGeom prst="rect">
+            <a:avLst/>
+          </a:prstGeom>
+          <a:noFill/>
+        </p:spPr>
+        <p:txBody>
+          <a:bodyPr wrap="square" anchor="t" lIns="0" rIns="0" tIns="0" bIns="0">
+            <a:noAutofit/>
+          </a:bodyPr>
+          <a:lstStyle/>
+          <a:p>
+            <a:pPr algn="l">
+              <a:lnSpc>
+                <a:spcPct val="115000"/>
+              </a:lnSpc>
+            </a:pPr>
+            <a:r>
+              <a:rPr sz="2000" b="0" i="0">
+                <a:solidFill>
+                  <a:srgbClr val="000000"/>
+                </a:solidFill>
+                <a:latin typeface="Calibri"/>
+                <a:ea typeface="Microsoft YaHei"/>
+                <a:cs typeface="Microsoft YaHei"/>
+              </a:rPr>
+              <a:t>Three export buttons, equal weight</a:t>
+            </a:r>
+          </a:p>
+        </p:txBody>
+      </p:sp>
+      <p:sp>
+        <p:nvSpPr>
+          <p:cNvPr id="17" name="TextBox 16"/>
+          <p:cNvSpPr txBox="1"/>
+          <p:nvPr/>
+        </p:nvSpPr>
+        <p:spPr>
+          <a:xfrm>
+            <a:off x="5857080" y="4646166"/>
+            <a:ext cx="5557374" cy="346455"/>
+          </a:xfrm>
+          <a:prstGeom prst="rect">
+            <a:avLst/>
+          </a:prstGeom>
+          <a:noFill/>
+        </p:spPr>
+        <p:txBody>
+          <a:bodyPr wrap="square" anchor="t" lIns="0" rIns="0" tIns="0" bIns="0">
+            <a:noAutofit/>
+          </a:bodyPr>
+          <a:lstStyle/>
+          <a:p>
+            <a:pPr algn="l">
+              <a:lnSpc>
+                <a:spcPct val="115000"/>
+              </a:lnSpc>
+            </a:pPr>
+            <a:r>
+              <a:rPr sz="2000" b="0" i="0">
+                <a:solidFill>
+                  <a:srgbClr val="000000"/>
+                </a:solidFill>
+                <a:latin typeface="Calibri"/>
+                <a:ea typeface="Microsoft YaHei"/>
+                <a:cs typeface="Microsoft YaHei"/>
+              </a:rPr>
+              <a:t>One primary action, two visibly secondary</a:t>
+            </a:r>
+          </a:p>
+        </p:txBody>
+      </p:sp>
+      <p:sp>
+        <p:nvSpPr>
+          <p:cNvPr id="18" name="Rectangle 17"/>
+          <p:cNvSpPr/>
+          <p:nvPr/>
+        </p:nvSpPr>
+        <p:spPr>
+          <a:xfrm>
+            <a:off x="685800" y="5029197"/>
+            <a:ext cx="10820095" cy="9525"/>
+          </a:xfrm>
+          <a:prstGeom prst="rect">
+            <a:avLst/>
+          </a:prstGeom>
+          <a:solidFill>
+            <a:srgbClr val="D8DEE4"/>
+          </a:solidFill>
+          <a:ln>
+            <a:noFill/>
+          </a:ln>
+          <a:effectLst/>
+        </p:spPr>
+        <p:style>
+          <a:lnRef idx="1">
+            <a:schemeClr val="accent1"/>
+          </a:lnRef>
+          <a:fillRef idx="3">
+            <a:schemeClr val="accent1"/>
+          </a:fillRef>
+          <a:effectRef idx="2">
+            <a:schemeClr val="accent1"/>
+          </a:effectRef>
+          <a:fontRef idx="minor">
+            <a:schemeClr val="lt1"/>
+          </a:fontRef>
+        </p:style>
+        <p:txBody>
+          <a:bodyPr rtlCol="0" anchor="ctr"/>
+          <a:lstStyle/>
+          <a:p>
+            <a:pPr algn="ctr"/>
+          </a:p>
+        </p:txBody>
+      </p:sp>
+      <p:sp>
+        <p:nvSpPr>
+          <p:cNvPr id="19" name="Rectangle 18"/>
+          <p:cNvSpPr/>
+          <p:nvPr/>
+        </p:nvSpPr>
+        <p:spPr>
+          <a:xfrm>
+            <a:off x="685800" y="5029197"/>
+            <a:ext cx="10820095" cy="766064"/>
+          </a:xfrm>
+          <a:prstGeom prst="rect">
+            <a:avLst/>
+          </a:prstGeom>
+          <a:solidFill>
+            <a:srgbClr val="F2F2F2"/>
+          </a:solidFill>
+          <a:ln>
+            <a:noFill/>
+          </a:ln>
+          <a:effectLst/>
+        </p:spPr>
+        <p:style>
+          <a:lnRef idx="1">
+            <a:schemeClr val="accent1"/>
+          </a:lnRef>
+          <a:fillRef idx="3">
+            <a:schemeClr val="accent1"/>
+          </a:fillRef>
+          <a:effectRef idx="2">
+            <a:schemeClr val="accent1"/>
+          </a:effectRef>
+          <a:fontRef idx="minor">
+            <a:schemeClr val="lt1"/>
+          </a:fontRef>
+        </p:style>
+        <p:txBody>
+          <a:bodyPr rtlCol="0" anchor="ctr"/>
+          <a:lstStyle/>
+          <a:p>
+            <a:pPr algn="ctr"/>
+          </a:p>
+        </p:txBody>
+      </p:sp>
+      <p:sp>
+        <p:nvSpPr>
+          <p:cNvPr id="20" name="TextBox 19"/>
+          <p:cNvSpPr txBox="1"/>
+          <p:nvPr/>
+        </p:nvSpPr>
+        <p:spPr>
+          <a:xfrm>
+            <a:off x="813816" y="5102349"/>
+            <a:ext cx="4823808" cy="656336"/>
+          </a:xfrm>
+          <a:prstGeom prst="rect">
+            <a:avLst/>
+          </a:prstGeom>
+          <a:noFill/>
+        </p:spPr>
+        <p:txBody>
+          <a:bodyPr wrap="square" anchor="t" lIns="0" rIns="0" tIns="0" bIns="0">
+            <a:noAutofit/>
+          </a:bodyPr>
+          <a:lstStyle/>
+          <a:p>
+            <a:pPr algn="l">
+              <a:lnSpc>
+                <a:spcPct val="115000"/>
+              </a:lnSpc>
+            </a:pPr>
+            <a:r>
+              <a:rPr sz="2000" b="0" i="0">
+                <a:solidFill>
+                  <a:srgbClr val="000000"/>
+                </a:solidFill>
+                <a:latin typeface="Calibri"/>
+                <a:ea typeface="Microsoft YaHei"/>
+                <a:cs typeface="Microsoft YaHei"/>
+              </a:rPr>
+              <a:t>375px horizontal overflow (confirmed bug)</a:t>
+            </a:r>
+          </a:p>
+        </p:txBody>
+      </p:sp>
+      <p:sp>
+        <p:nvSpPr>
+          <p:cNvPr id="21" name="TextBox 20"/>
+          <p:cNvSpPr txBox="1"/>
+          <p:nvPr/>
+        </p:nvSpPr>
+        <p:spPr>
+          <a:xfrm>
+            <a:off x="5857080" y="5102349"/>
+            <a:ext cx="5557374" cy="656336"/>
+          </a:xfrm>
+          <a:prstGeom prst="rect">
+            <a:avLst/>
+          </a:prstGeom>
+          <a:noFill/>
+        </p:spPr>
+        <p:txBody>
+          <a:bodyPr wrap="square" anchor="t" lIns="0" rIns="0" tIns="0" bIns="0">
+            <a:noAutofit/>
+          </a:bodyPr>
+          <a:lstStyle/>
+          <a:p>
+            <a:pPr algn="l">
+              <a:lnSpc>
+                <a:spcPct val="115000"/>
+              </a:lnSpc>
+            </a:pPr>
+            <a:r>
+              <a:rPr sz="2000" b="0" i="0">
+                <a:solidFill>
+                  <a:srgbClr val="000000"/>
+                </a:solidFill>
+                <a:latin typeface="Calibri"/>
+                <a:ea typeface="Microsoft YaHei"/>
+                <a:cs typeface="Microsoft YaHei"/>
+              </a:rPr>
+              <a:t>Fixed; re-verified mechanically</a:t>
+            </a:r>
+          </a:p>
+        </p:txBody>
+      </p:sp>
+      <p:sp>
+        <p:nvSpPr>
+          <p:cNvPr id="22" name="Rectangle 21"/>
+          <p:cNvSpPr/>
+          <p:nvPr/>
+        </p:nvSpPr>
+        <p:spPr>
+          <a:xfrm>
+            <a:off x="685800" y="5795261"/>
+            <a:ext cx="10820095" cy="9525"/>
+          </a:xfrm>
+          <a:prstGeom prst="rect">
+            <a:avLst/>
+          </a:prstGeom>
+          <a:solidFill>
+            <a:srgbClr val="D8DEE4"/>
+          </a:solidFill>
+          <a:ln>
+            <a:noFill/>
+          </a:ln>
+          <a:effectLst/>
+        </p:spPr>
+        <p:style>
+          <a:lnRef idx="1">
+            <a:schemeClr val="accent1"/>
+          </a:lnRef>
+          <a:fillRef idx="3">
+            <a:schemeClr val="accent1"/>
+          </a:fillRef>
+          <a:effectRef idx="2">
+            <a:schemeClr val="accent1"/>
+          </a:effectRef>
+          <a:fontRef idx="minor">
+            <a:schemeClr val="lt1"/>
+          </a:fontRef>
+        </p:style>
+        <p:txBody>
+          <a:bodyPr rtlCol="0" anchor="ctr"/>
+          <a:lstStyle/>
+          <a:p>
+            <a:pPr algn="ctr"/>
+          </a:p>
+        </p:txBody>
+      </p:sp>
+      <p:sp>
+        <p:nvSpPr>
+          <p:cNvPr id="23" name="TextBox 22"/>
+          <p:cNvSpPr txBox="1"/>
+          <p:nvPr/>
+        </p:nvSpPr>
+        <p:spPr>
+          <a:xfrm>
+            <a:off x="685800" y="6355080"/>
+            <a:ext cx="9601200" cy="274320"/>
+          </a:xfrm>
+          <a:prstGeom prst="rect">
+            <a:avLst/>
+          </a:prstGeom>
+          <a:noFill/>
+        </p:spPr>
+        <p:txBody>
+          <a:bodyPr wrap="square" anchor="t" lIns="0" rIns="0" tIns="0" bIns="0">
+            <a:noAutofit/>
+          </a:bodyPr>
+          <a:lstStyle/>
+          <a:p>
+            <a:pPr algn="l"/>
+            <a:r>
+              <a:rPr sz="1200" b="0" i="1">
+                <a:solidFill>
+                  <a:srgbClr val="808080"/>
+                </a:solidFill>
+                <a:latin typeface="Calibri"/>
+                <a:ea typeface="Microsoft YaHei"/>
+                <a:cs typeface="Microsoft YaHei"/>
+              </a:rPr>
+              <a:t>docs/DESIGN_REVIEW_4_1_HUMAN_REVIEW.md; docs/DESIGN_REVIEW_4_1_RELEASE.md</a:t>
+            </a:r>
+          </a:p>
+        </p:txBody>
+      </p:sp>
+      <p:sp>
+        <p:nvSpPr>
+          <p:cNvPr id="24" name="TextBox 23"/>
+          <p:cNvSpPr txBox="1"/>
+          <p:nvPr/>
+        </p:nvSpPr>
+        <p:spPr>
+          <a:xfrm>
+            <a:off x="10591495" y="6355080"/>
+            <a:ext cx="914400" cy="274320"/>
+          </a:xfrm>
+          <a:prstGeom prst="rect">
+            <a:avLst/>
+          </a:prstGeom>
+          <a:noFill/>
+        </p:spPr>
+        <p:txBody>
+          <a:bodyPr wrap="square" anchor="t" lIns="0" rIns="0" tIns="0" bIns="0">
+            <a:noAutofit/>
+          </a:bodyPr>
+          <a:lstStyle/>
+          <a:p>
+            <a:pPr algn="l"/>
+            <a:r>
+              <a:rPr sz="1200" b="0" i="0">
+                <a:solidFill>
+                  <a:srgbClr val="808080"/>
+                </a:solidFill>
+                <a:latin typeface="Calibri"/>
+                <a:ea typeface="Microsoft YaHei"/>
+                <a:cs typeface="Microsoft YaHei"/>
+              </a:rPr>
+              <a:t>20</a:t>
+            </a:r>
+          </a:p>
+        </p:txBody>
+      </p:sp>
+    </p:spTree>
+  </p:cSld>
+  <p:clrMapOvr>
+    <a:masterClrMapping/>
+  </p:clrMapOvr>
+</p:sld>
+</file>
+
+<file path=ppt/slides/slide22.xml><?xml version="1.0" encoding="utf-8"?>
+<p:sld xmlns:a="http://schemas.openxmlformats.org/drawingml/2006/main" xmlns:p="http://schemas.openxmlformats.org/presentationml/2006/main" xmlns:r="http://schemas.openxmlformats.org/officeDocument/2006/relationships">
+  <p:cSld>
+    <p:spTree>
+      <p:nvGrpSpPr>
+        <p:cNvPr id="1" name=""/>
+        <p:cNvGrpSpPr/>
+        <p:nvPr/>
+      </p:nvGrpSpPr>
+      <p:grpSpPr/>
+      <p:sp>
+        <p:nvSpPr>
+          <p:cNvPr id="2" name="TextBox 1"/>
+          <p:cNvSpPr txBox="1"/>
+          <p:nvPr/>
+        </p:nvSpPr>
+        <p:spPr>
+          <a:xfrm>
+            <a:off x="685800" y="457200"/>
+            <a:ext cx="10820095" cy="274320"/>
+          </a:xfrm>
+          <a:prstGeom prst="rect">
+            <a:avLst/>
+          </a:prstGeom>
+          <a:noFill/>
+        </p:spPr>
+        <p:txBody>
+          <a:bodyPr wrap="square" anchor="t" lIns="0" rIns="0" tIns="0" bIns="0">
+            <a:noAutofit/>
+          </a:bodyPr>
+          <a:lstStyle/>
+          <a:p>
+            <a:pPr algn="l"/>
+            <a:r>
+              <a:rPr sz="1600" b="1" i="0">
+                <a:solidFill>
+                  <a:srgbClr val="1F4E78"/>
+                </a:solidFill>
+                <a:latin typeface="Calibri"/>
+                <a:ea typeface="Microsoft YaHei"/>
+                <a:cs typeface="Microsoft YaHei"/>
+              </a:rPr>
+              <a:t>TUTORIAL 4.1 — THE X BROADCAST BOUNDARY</a:t>
+            </a:r>
+          </a:p>
+        </p:txBody>
+      </p:sp>
+      <p:sp>
+        <p:nvSpPr>
+          <p:cNvPr id="3" name="TextBox 2"/>
+          <p:cNvSpPr txBox="1"/>
+          <p:nvPr/>
+        </p:nvSpPr>
+        <p:spPr>
+          <a:xfrm>
+            <a:off x="685800" y="786384"/>
+            <a:ext cx="10820095" cy="1037335"/>
+          </a:xfrm>
+          <a:prstGeom prst="rect">
+            <a:avLst/>
+          </a:prstGeom>
+          <a:noFill/>
+        </p:spPr>
+        <p:txBody>
+          <a:bodyPr wrap="square" anchor="t" lIns="0" rIns="0" tIns="0" bIns="0">
+            <a:noAutofit/>
+          </a:bodyPr>
+          <a:lstStyle/>
+          <a:p>
+            <a:pPr algn="l">
+              <a:lnSpc>
+                <a:spcPct val="108000"/>
+              </a:lnSpc>
+            </a:pPr>
+            <a:r>
+              <a:rPr sz="3200" b="1" i="0">
+                <a:solidFill>
+                  <a:srgbClr val="1F4E78"/>
+                </a:solidFill>
+                <a:latin typeface="Calibri"/>
+                <a:ea typeface="Microsoft YaHei"/>
+                <a:cs typeface="Microsoft YaHei"/>
+              </a:rPr>
+              <a:t>Before fixing a missing output, find the layer where it disappears</a:t>
+            </a:r>
+          </a:p>
+        </p:txBody>
+      </p:sp>
+      <p:sp>
+        <p:nvSpPr>
+          <p:cNvPr id="4" name="Rectangle 3"/>
+          <p:cNvSpPr/>
+          <p:nvPr/>
+        </p:nvSpPr>
+        <p:spPr>
+          <a:xfrm>
+            <a:off x="685800" y="1933447"/>
+            <a:ext cx="10820095" cy="9525"/>
+          </a:xfrm>
+          <a:prstGeom prst="rect">
+            <a:avLst/>
+          </a:prstGeom>
+          <a:solidFill>
+            <a:srgbClr val="1F4E78"/>
+          </a:solidFill>
+          <a:ln>
+            <a:noFill/>
+          </a:ln>
+          <a:effectLst/>
+        </p:spPr>
+        <p:style>
+          <a:lnRef idx="1">
+            <a:schemeClr val="accent1"/>
+          </a:lnRef>
+          <a:fillRef idx="3">
+            <a:schemeClr val="accent1"/>
+          </a:fillRef>
+          <a:effectRef idx="2">
+            <a:schemeClr val="accent1"/>
+          </a:effectRef>
+          <a:fontRef idx="minor">
+            <a:schemeClr val="lt1"/>
+          </a:fontRef>
+        </p:style>
+        <p:txBody>
+          <a:bodyPr rtlCol="0" anchor="ctr"/>
+          <a:lstStyle/>
+          <a:p>
+            <a:pPr algn="ctr"/>
+          </a:p>
+        </p:txBody>
+      </p:sp>
+      <p:sp>
+        <p:nvSpPr>
+          <p:cNvPr id="5" name="TextBox 4"/>
+          <p:cNvSpPr txBox="1"/>
+          <p:nvPr/>
+        </p:nvSpPr>
+        <p:spPr>
+          <a:xfrm>
+            <a:off x="685800" y="2079751"/>
+            <a:ext cx="10820095" cy="700532"/>
+          </a:xfrm>
+          <a:prstGeom prst="rect">
+            <a:avLst/>
+          </a:prstGeom>
+          <a:noFill/>
+        </p:spPr>
+        <p:txBody>
+          <a:bodyPr wrap="square" anchor="t" lIns="0" rIns="0" tIns="0" bIns="0">
+            <a:noAutofit/>
+          </a:bodyPr>
+          <a:lstStyle/>
+          <a:p>
+            <a:pPr algn="l">
+              <a:lnSpc>
+                <a:spcPct val="130000"/>
+              </a:lnSpc>
+            </a:pPr>
+            <a:r>
+              <a:rPr sz="1900" b="0" i="1">
+                <a:solidFill>
+                  <a:srgbClr val="595959"/>
+                </a:solidFill>
+                <a:latin typeface="Calibri"/>
+                <a:ea typeface="Microsoft YaHei"/>
+                <a:cs typeface="Microsoft YaHei"/>
+              </a:rPr>
+              <a:t>X's free syndication data never includes broadcast card metadata — confirmed by reading the raw payload, not guessed.</a:t>
+            </a:r>
+          </a:p>
+        </p:txBody>
+      </p:sp>
+      <p:sp>
+        <p:nvSpPr>
+          <p:cNvPr id="6" name="Rectangle 5"/>
+          <p:cNvSpPr/>
+          <p:nvPr/>
+        </p:nvSpPr>
+        <p:spPr>
+          <a:xfrm>
+            <a:off x="685800" y="2908299"/>
+            <a:ext cx="10820095" cy="446277"/>
+          </a:xfrm>
+          <a:prstGeom prst="rect">
+            <a:avLst/>
+          </a:prstGeom>
+          <a:solidFill>
+            <a:srgbClr val="1F4E78"/>
+          </a:solidFill>
+          <a:ln>
+            <a:noFill/>
+          </a:ln>
+          <a:effectLst/>
+        </p:spPr>
+        <p:style>
+          <a:lnRef idx="1">
+            <a:schemeClr val="accent1"/>
+          </a:lnRef>
+          <a:fillRef idx="3">
+            <a:schemeClr val="accent1"/>
+          </a:fillRef>
+          <a:effectRef idx="2">
+            <a:schemeClr val="accent1"/>
+          </a:effectRef>
+          <a:fontRef idx="minor">
+            <a:schemeClr val="lt1"/>
+          </a:fontRef>
+        </p:style>
+        <p:txBody>
+          <a:bodyPr rtlCol="0" anchor="ctr"/>
+          <a:lstStyle/>
+          <a:p>
+            <a:pPr algn="ctr"/>
+          </a:p>
+        </p:txBody>
+      </p:sp>
+      <p:sp>
+        <p:nvSpPr>
+          <p:cNvPr id="7" name="TextBox 6"/>
+          <p:cNvSpPr txBox="1"/>
+          <p:nvPr/>
+        </p:nvSpPr>
+        <p:spPr>
+          <a:xfrm>
+            <a:off x="813816" y="2981451"/>
+            <a:ext cx="3906851" cy="336549"/>
+          </a:xfrm>
+          <a:prstGeom prst="rect">
+            <a:avLst/>
+          </a:prstGeom>
+          <a:noFill/>
+        </p:spPr>
+        <p:txBody>
+          <a:bodyPr wrap="square" anchor="t" lIns="0" rIns="0" tIns="0" bIns="0">
+            <a:noAutofit/>
+          </a:bodyPr>
+          <a:lstStyle/>
+          <a:p>
+            <a:pPr algn="l"/>
+            <a:r>
+              <a:rPr sz="1700" b="1" i="0">
+                <a:solidFill>
+                  <a:srgbClr val="FFFFFF"/>
+                </a:solidFill>
+                <a:latin typeface="Calibri"/>
+                <a:ea typeface="Microsoft YaHei"/>
+                <a:cs typeface="Microsoft YaHei"/>
+              </a:rPr>
+              <a:t>Layer</a:t>
+            </a:r>
+          </a:p>
+        </p:txBody>
+      </p:sp>
+      <p:sp>
+        <p:nvSpPr>
+          <p:cNvPr id="8" name="TextBox 7"/>
+          <p:cNvSpPr txBox="1"/>
+          <p:nvPr/>
+        </p:nvSpPr>
+        <p:spPr>
+          <a:xfrm>
+            <a:off x="4940123" y="2981451"/>
+            <a:ext cx="6474331" cy="336549"/>
+          </a:xfrm>
+          <a:prstGeom prst="rect">
+            <a:avLst/>
+          </a:prstGeom>
+          <a:noFill/>
+        </p:spPr>
+        <p:txBody>
+          <a:bodyPr wrap="square" anchor="t" lIns="0" rIns="0" tIns="0" bIns="0">
+            <a:noAutofit/>
+          </a:bodyPr>
+          <a:lstStyle/>
+          <a:p>
+            <a:pPr algn="l"/>
+            <a:r>
+              <a:rPr sz="1700" b="1" i="0">
+                <a:solidFill>
+                  <a:srgbClr val="FFFFFF"/>
+                </a:solidFill>
+                <a:latin typeface="Calibri"/>
+                <a:ea typeface="Microsoft YaHei"/>
+                <a:cs typeface="Microsoft YaHei"/>
+              </a:rPr>
+              <a:t>Result</a:t>
+            </a:r>
+          </a:p>
+        </p:txBody>
+      </p:sp>
+      <p:sp>
+        <p:nvSpPr>
+          <p:cNvPr id="9" name="TextBox 8"/>
+          <p:cNvSpPr txBox="1"/>
+          <p:nvPr/>
+        </p:nvSpPr>
+        <p:spPr>
+          <a:xfrm>
+            <a:off x="813816" y="3427728"/>
+            <a:ext cx="3906851" cy="408432"/>
+          </a:xfrm>
+          <a:prstGeom prst="rect">
+            <a:avLst/>
+          </a:prstGeom>
+          <a:noFill/>
+        </p:spPr>
+        <p:txBody>
+          <a:bodyPr wrap="square" anchor="t" lIns="0" rIns="0" tIns="0" bIns="0">
+            <a:noAutofit/>
+          </a:bodyPr>
+          <a:lstStyle/>
+          <a:p>
+            <a:pPr algn="l">
+              <a:lnSpc>
+                <a:spcPct val="115000"/>
+              </a:lnSpc>
+            </a:pPr>
+            <a:r>
+              <a:rPr sz="2400" b="0" i="0">
+                <a:solidFill>
+                  <a:srgbClr val="000000"/>
+                </a:solidFill>
+                <a:latin typeface="Calibri"/>
+                <a:ea typeface="Microsoft YaHei"/>
+                <a:cs typeface="Microsoft YaHei"/>
+              </a:rPr>
+              <a:t>X.com original page</a:t>
+            </a:r>
+          </a:p>
+        </p:txBody>
+      </p:sp>
+      <p:sp>
+        <p:nvSpPr>
+          <p:cNvPr id="10" name="TextBox 9"/>
+          <p:cNvSpPr txBox="1"/>
+          <p:nvPr/>
+        </p:nvSpPr>
+        <p:spPr>
+          <a:xfrm>
+            <a:off x="4940123" y="3427728"/>
+            <a:ext cx="6474331" cy="408432"/>
+          </a:xfrm>
+          <a:prstGeom prst="rect">
+            <a:avLst/>
+          </a:prstGeom>
+          <a:noFill/>
+        </p:spPr>
+        <p:txBody>
+          <a:bodyPr wrap="square" anchor="t" lIns="0" rIns="0" tIns="0" bIns="0">
+            <a:noAutofit/>
+          </a:bodyPr>
+          <a:lstStyle/>
+          <a:p>
+            <a:pPr algn="l">
+              <a:lnSpc>
+                <a:spcPct val="115000"/>
+              </a:lnSpc>
+            </a:pPr>
+            <a:r>
+              <a:rPr sz="2400" b="0" i="0">
+                <a:solidFill>
+                  <a:srgbClr val="000000"/>
+                </a:solidFill>
+                <a:latin typeface="Calibri"/>
+                <a:ea typeface="Microsoft YaHei"/>
+                <a:cs typeface="Microsoft YaHei"/>
+              </a:rPr>
+              <a:t>Rich animated Broadcast card — visible</a:t>
+            </a:r>
+          </a:p>
+        </p:txBody>
+      </p:sp>
+      <p:sp>
+        <p:nvSpPr>
+          <p:cNvPr id="11" name="Rectangle 10"/>
+          <p:cNvSpPr/>
+          <p:nvPr/>
+        </p:nvSpPr>
+        <p:spPr>
+          <a:xfrm>
+            <a:off x="685800" y="3872736"/>
+            <a:ext cx="10820095" cy="9525"/>
+          </a:xfrm>
+          <a:prstGeom prst="rect">
+            <a:avLst/>
+          </a:prstGeom>
+          <a:solidFill>
+            <a:srgbClr val="D8DEE4"/>
+          </a:solidFill>
+          <a:ln>
+            <a:noFill/>
+          </a:ln>
+          <a:effectLst/>
+        </p:spPr>
+        <p:style>
+          <a:lnRef idx="1">
+            <a:schemeClr val="accent1"/>
+          </a:lnRef>
+          <a:fillRef idx="3">
+            <a:schemeClr val="accent1"/>
+          </a:fillRef>
+          <a:effectRef idx="2">
+            <a:schemeClr val="accent1"/>
+          </a:effectRef>
+          <a:fontRef idx="minor">
+            <a:schemeClr val="lt1"/>
+          </a:fontRef>
+        </p:style>
+        <p:txBody>
+          <a:bodyPr rtlCol="0" anchor="ctr"/>
+          <a:lstStyle/>
+          <a:p>
+            <a:pPr algn="ctr"/>
+          </a:p>
+        </p:txBody>
+      </p:sp>
+      <p:sp>
+        <p:nvSpPr>
+          <p:cNvPr id="12" name="Rectangle 11"/>
+          <p:cNvSpPr/>
+          <p:nvPr/>
+        </p:nvSpPr>
+        <p:spPr>
+          <a:xfrm>
+            <a:off x="685800" y="3872736"/>
+            <a:ext cx="10820095" cy="518160"/>
+          </a:xfrm>
+          <a:prstGeom prst="rect">
+            <a:avLst/>
+          </a:prstGeom>
+          <a:solidFill>
+            <a:srgbClr val="F2F2F2"/>
+          </a:solidFill>
+          <a:ln>
+            <a:noFill/>
+          </a:ln>
+          <a:effectLst/>
+        </p:spPr>
+        <p:style>
+          <a:lnRef idx="1">
+            <a:schemeClr val="accent1"/>
+          </a:lnRef>
+          <a:fillRef idx="3">
+            <a:schemeClr val="accent1"/>
+          </a:fillRef>
+          <a:effectRef idx="2">
+            <a:schemeClr val="accent1"/>
+          </a:effectRef>
+          <a:fontRef idx="minor">
+            <a:schemeClr val="lt1"/>
+          </a:fontRef>
+        </p:style>
+        <p:txBody>
+          <a:bodyPr rtlCol="0" anchor="ctr"/>
+          <a:lstStyle/>
+          <a:p>
+            <a:pPr algn="ctr"/>
+          </a:p>
+        </p:txBody>
+      </p:sp>
+      <p:sp>
+        <p:nvSpPr>
+          <p:cNvPr id="13" name="TextBox 12"/>
+          <p:cNvSpPr txBox="1"/>
+          <p:nvPr/>
+        </p:nvSpPr>
+        <p:spPr>
+          <a:xfrm>
+            <a:off x="813816" y="3945888"/>
+            <a:ext cx="3906851" cy="408432"/>
+          </a:xfrm>
+          <a:prstGeom prst="rect">
+            <a:avLst/>
+          </a:prstGeom>
+          <a:noFill/>
+        </p:spPr>
+        <p:txBody>
+          <a:bodyPr wrap="square" anchor="t" lIns="0" rIns="0" tIns="0" bIns="0">
+            <a:noAutofit/>
+          </a:bodyPr>
+          <a:lstStyle/>
+          <a:p>
+            <a:pPr algn="l">
+              <a:lnSpc>
+                <a:spcPct val="115000"/>
+              </a:lnSpc>
+            </a:pPr>
+            <a:r>
+              <a:rPr sz="2400" b="0" i="0">
+                <a:solidFill>
+                  <a:srgbClr val="000000"/>
+                </a:solidFill>
+                <a:latin typeface="Calibri"/>
+                <a:ea typeface="Microsoft YaHei"/>
+                <a:cs typeface="Microsoft YaHei"/>
+              </a:rPr>
+              <a:t>Free syndication payload</a:t>
+            </a:r>
+          </a:p>
+        </p:txBody>
+      </p:sp>
+      <p:sp>
+        <p:nvSpPr>
+          <p:cNvPr id="14" name="TextBox 13"/>
+          <p:cNvSpPr txBox="1"/>
+          <p:nvPr/>
+        </p:nvSpPr>
+        <p:spPr>
+          <a:xfrm>
+            <a:off x="4940123" y="3945888"/>
+            <a:ext cx="6474331" cy="408432"/>
+          </a:xfrm>
+          <a:prstGeom prst="rect">
+            <a:avLst/>
+          </a:prstGeom>
+          <a:noFill/>
+        </p:spPr>
+        <p:txBody>
+          <a:bodyPr wrap="square" anchor="t" lIns="0" rIns="0" tIns="0" bIns="0">
+            <a:noAutofit/>
+          </a:bodyPr>
+          <a:lstStyle/>
+          <a:p>
+            <a:pPr algn="l">
+              <a:lnSpc>
+                <a:spcPct val="115000"/>
+              </a:lnSpc>
+            </a:pPr>
+            <a:r>
+              <a:rPr sz="2400" b="0" i="0">
+                <a:solidFill>
+                  <a:srgbClr val="000000"/>
+                </a:solidFill>
+                <a:latin typeface="Calibri"/>
+                <a:ea typeface="Microsoft YaHei"/>
+                <a:cs typeface="Microsoft YaHei"/>
+              </a:rPr>
+              <a:t>URL entity only — no card, poster, or title</a:t>
+            </a:r>
+          </a:p>
+        </p:txBody>
+      </p:sp>
+      <p:sp>
+        <p:nvSpPr>
+          <p:cNvPr id="15" name="Rectangle 14"/>
+          <p:cNvSpPr/>
+          <p:nvPr/>
+        </p:nvSpPr>
+        <p:spPr>
+          <a:xfrm>
+            <a:off x="685800" y="4390896"/>
+            <a:ext cx="10820095" cy="9525"/>
+          </a:xfrm>
+          <a:prstGeom prst="rect">
+            <a:avLst/>
+          </a:prstGeom>
+          <a:solidFill>
+            <a:srgbClr val="D8DEE4"/>
+          </a:solidFill>
+          <a:ln>
+            <a:noFill/>
+          </a:ln>
+          <a:effectLst/>
+        </p:spPr>
+        <p:style>
+          <a:lnRef idx="1">
+            <a:schemeClr val="accent1"/>
+          </a:lnRef>
+          <a:fillRef idx="3">
+            <a:schemeClr val="accent1"/>
+          </a:fillRef>
+          <a:effectRef idx="2">
+            <a:schemeClr val="accent1"/>
+          </a:effectRef>
+          <a:fontRef idx="minor">
+            <a:schemeClr val="lt1"/>
+          </a:fontRef>
+        </p:style>
+        <p:txBody>
+          <a:bodyPr rtlCol="0" anchor="ctr"/>
+          <a:lstStyle/>
+          <a:p>
+            <a:pPr algn="ctr"/>
+          </a:p>
+        </p:txBody>
+      </p:sp>
+      <p:sp>
+        <p:nvSpPr>
+          <p:cNvPr id="16" name="TextBox 15"/>
+          <p:cNvSpPr txBox="1"/>
+          <p:nvPr/>
+        </p:nvSpPr>
+        <p:spPr>
+          <a:xfrm>
+            <a:off x="813816" y="4464048"/>
+            <a:ext cx="3906851" cy="408432"/>
+          </a:xfrm>
+          <a:prstGeom prst="rect">
+            <a:avLst/>
+          </a:prstGeom>
+          <a:noFill/>
+        </p:spPr>
+        <p:txBody>
+          <a:bodyPr wrap="square" anchor="t" lIns="0" rIns="0" tIns="0" bIns="0">
+            <a:noAutofit/>
+          </a:bodyPr>
+          <a:lstStyle/>
+          <a:p>
+            <a:pPr algn="l">
+              <a:lnSpc>
+                <a:spcPct val="115000"/>
+              </a:lnSpc>
+            </a:pPr>
+            <a:r>
+              <a:rPr sz="2400" b="0" i="0">
+                <a:solidFill>
+                  <a:srgbClr val="000000"/>
+                </a:solidFill>
+                <a:latin typeface="Calibri"/>
+                <a:ea typeface="Microsoft YaHei"/>
+                <a:cs typeface="Microsoft YaHei"/>
+              </a:rPr>
+              <a:t>react-tweet library</a:t>
+            </a:r>
+          </a:p>
+        </p:txBody>
+      </p:sp>
+      <p:sp>
+        <p:nvSpPr>
+          <p:cNvPr id="17" name="TextBox 16"/>
+          <p:cNvSpPr txBox="1"/>
+          <p:nvPr/>
+        </p:nvSpPr>
+        <p:spPr>
+          <a:xfrm>
+            <a:off x="4940123" y="4464048"/>
+            <a:ext cx="6474331" cy="408432"/>
+          </a:xfrm>
+          <a:prstGeom prst="rect">
+            <a:avLst/>
+          </a:prstGeom>
+          <a:noFill/>
+        </p:spPr>
+        <p:txBody>
+          <a:bodyPr wrap="square" anchor="t" lIns="0" rIns="0" tIns="0" bIns="0">
+            <a:noAutofit/>
+          </a:bodyPr>
+          <a:lstStyle/>
+          <a:p>
+            <a:pPr algn="l">
+              <a:lnSpc>
+                <a:spcPct val="115000"/>
+              </a:lnSpc>
+            </a:pPr>
+            <a:r>
+              <a:rPr sz="2400" b="0" i="0">
+                <a:solidFill>
+                  <a:srgbClr val="000000"/>
+                </a:solidFill>
+                <a:latin typeface="Calibri"/>
+                <a:ea typeface="Microsoft YaHei"/>
+                <a:cs typeface="Microsoft YaHei"/>
+              </a:rPr>
+              <a:t>No card/broadcast concept anywhere in source</a:t>
+            </a:r>
+          </a:p>
+        </p:txBody>
+      </p:sp>
+      <p:sp>
+        <p:nvSpPr>
+          <p:cNvPr id="18" name="Rectangle 17"/>
+          <p:cNvSpPr/>
+          <p:nvPr/>
+        </p:nvSpPr>
+        <p:spPr>
+          <a:xfrm>
+            <a:off x="685800" y="4909056"/>
+            <a:ext cx="10820095" cy="9525"/>
+          </a:xfrm>
+          <a:prstGeom prst="rect">
+            <a:avLst/>
+          </a:prstGeom>
+          <a:solidFill>
+            <a:srgbClr val="D8DEE4"/>
+          </a:solidFill>
+          <a:ln>
+            <a:noFill/>
+          </a:ln>
+          <a:effectLst/>
+        </p:spPr>
+        <p:style>
+          <a:lnRef idx="1">
+            <a:schemeClr val="accent1"/>
+          </a:lnRef>
+          <a:fillRef idx="3">
+            <a:schemeClr val="accent1"/>
+          </a:fillRef>
+          <a:effectRef idx="2">
+            <a:schemeClr val="accent1"/>
+          </a:effectRef>
+          <a:fontRef idx="minor">
+            <a:schemeClr val="lt1"/>
+          </a:fontRef>
+        </p:style>
+        <p:txBody>
+          <a:bodyPr rtlCol="0" anchor="ctr"/>
+          <a:lstStyle/>
+          <a:p>
+            <a:pPr algn="ctr"/>
+          </a:p>
+        </p:txBody>
+      </p:sp>
+      <p:sp>
+        <p:nvSpPr>
+          <p:cNvPr id="19" name="Rectangle 18"/>
+          <p:cNvSpPr/>
+          <p:nvPr/>
+        </p:nvSpPr>
+        <p:spPr>
+          <a:xfrm>
+            <a:off x="685800" y="4909056"/>
+            <a:ext cx="10820095" cy="518160"/>
+          </a:xfrm>
+          <a:prstGeom prst="rect">
+            <a:avLst/>
+          </a:prstGeom>
+          <a:solidFill>
+            <a:srgbClr val="F2F2F2"/>
+          </a:solidFill>
+          <a:ln>
+            <a:noFill/>
+          </a:ln>
+          <a:effectLst/>
+        </p:spPr>
+        <p:style>
+          <a:lnRef idx="1">
+            <a:schemeClr val="accent1"/>
+          </a:lnRef>
+          <a:fillRef idx="3">
+            <a:schemeClr val="accent1"/>
+          </a:fillRef>
+          <a:effectRef idx="2">
+            <a:schemeClr val="accent1"/>
+          </a:effectRef>
+          <a:fontRef idx="minor">
+            <a:schemeClr val="lt1"/>
+          </a:fontRef>
+        </p:style>
+        <p:txBody>
+          <a:bodyPr rtlCol="0" anchor="ctr"/>
+          <a:lstStyle/>
+          <a:p>
+            <a:pPr algn="ctr"/>
+          </a:p>
+        </p:txBody>
+      </p:sp>
+      <p:sp>
+        <p:nvSpPr>
+          <p:cNvPr id="20" name="TextBox 19"/>
+          <p:cNvSpPr txBox="1"/>
+          <p:nvPr/>
+        </p:nvSpPr>
+        <p:spPr>
+          <a:xfrm>
+            <a:off x="813816" y="4982208"/>
+            <a:ext cx="3906851" cy="408432"/>
+          </a:xfrm>
+          <a:prstGeom prst="rect">
+            <a:avLst/>
+          </a:prstGeom>
+          <a:noFill/>
+        </p:spPr>
+        <p:txBody>
+          <a:bodyPr wrap="square" anchor="t" lIns="0" rIns="0" tIns="0" bIns="0">
+            <a:noAutofit/>
+          </a:bodyPr>
+          <a:lstStyle/>
+          <a:p>
+            <a:pPr algn="l">
+              <a:lnSpc>
+                <a:spcPct val="115000"/>
+              </a:lnSpc>
+            </a:pPr>
+            <a:r>
+              <a:rPr sz="2400" b="0" i="0">
+                <a:solidFill>
+                  <a:srgbClr val="000000"/>
+                </a:solidFill>
+                <a:latin typeface="Calibri"/>
+                <a:ea typeface="Microsoft YaHei"/>
+                <a:cs typeface="Microsoft YaHei"/>
+              </a:rPr>
+              <a:t>This app + export</a:t>
+            </a:r>
+          </a:p>
+        </p:txBody>
+      </p:sp>
+      <p:sp>
+        <p:nvSpPr>
+          <p:cNvPr id="21" name="TextBox 20"/>
+          <p:cNvSpPr txBox="1"/>
+          <p:nvPr/>
+        </p:nvSpPr>
+        <p:spPr>
+          <a:xfrm>
+            <a:off x="4940123" y="4982208"/>
+            <a:ext cx="6474331" cy="408432"/>
+          </a:xfrm>
+          <a:prstGeom prst="rect">
+            <a:avLst/>
+          </a:prstGeom>
+          <a:noFill/>
+        </p:spPr>
+        <p:txBody>
+          <a:bodyPr wrap="square" anchor="t" lIns="0" rIns="0" tIns="0" bIns="0">
+            <a:noAutofit/>
+          </a:bodyPr>
+          <a:lstStyle/>
+          <a:p>
+            <a:pPr algn="l">
+              <a:lnSpc>
+                <a:spcPct val="115000"/>
+              </a:lnSpc>
+            </a:pPr>
+            <a:r>
+              <a:rPr sz="2400" b="0" i="0">
+                <a:solidFill>
+                  <a:srgbClr val="000000"/>
+                </a:solidFill>
+                <a:latin typeface="Calibri"/>
+                <a:ea typeface="Microsoft YaHei"/>
+                <a:cs typeface="Microsoft YaHei"/>
+              </a:rPr>
+              <a:t>Text + link — matches upstream data exactly</a:t>
+            </a:r>
+          </a:p>
+        </p:txBody>
+      </p:sp>
+      <p:sp>
+        <p:nvSpPr>
+          <p:cNvPr id="22" name="Rectangle 21"/>
+          <p:cNvSpPr/>
+          <p:nvPr/>
+        </p:nvSpPr>
+        <p:spPr>
+          <a:xfrm>
+            <a:off x="685800" y="5427216"/>
+            <a:ext cx="10820095" cy="9525"/>
+          </a:xfrm>
+          <a:prstGeom prst="rect">
+            <a:avLst/>
+          </a:prstGeom>
+          <a:solidFill>
+            <a:srgbClr val="D8DEE4"/>
+          </a:solidFill>
+          <a:ln>
+            <a:noFill/>
+          </a:ln>
+          <a:effectLst/>
+        </p:spPr>
+        <p:style>
+          <a:lnRef idx="1">
+            <a:schemeClr val="accent1"/>
+          </a:lnRef>
+          <a:fillRef idx="3">
+            <a:schemeClr val="accent1"/>
+          </a:fillRef>
+          <a:effectRef idx="2">
+            <a:schemeClr val="accent1"/>
+          </a:effectRef>
+          <a:fontRef idx="minor">
+            <a:schemeClr val="lt1"/>
+          </a:fontRef>
+        </p:style>
+        <p:txBody>
+          <a:bodyPr rtlCol="0" anchor="ctr"/>
+          <a:lstStyle/>
+          <a:p>
+            <a:pPr algn="ctr"/>
+          </a:p>
+        </p:txBody>
+      </p:sp>
+      <p:sp>
+        <p:nvSpPr>
+          <p:cNvPr id="23" name="TextBox 22"/>
+          <p:cNvSpPr txBox="1"/>
+          <p:nvPr/>
+        </p:nvSpPr>
+        <p:spPr>
+          <a:xfrm>
+            <a:off x="685800" y="6355080"/>
+            <a:ext cx="9601200" cy="274320"/>
+          </a:xfrm>
+          <a:prstGeom prst="rect">
+            <a:avLst/>
+          </a:prstGeom>
+          <a:noFill/>
+        </p:spPr>
+        <p:txBody>
+          <a:bodyPr wrap="square" anchor="t" lIns="0" rIns="0" tIns="0" bIns="0">
+            <a:noAutofit/>
+          </a:bodyPr>
+          <a:lstStyle/>
+          <a:p>
+            <a:pPr algn="l"/>
+            <a:r>
+              <a:rPr sz="1200" b="0" i="1">
+                <a:solidFill>
+                  <a:srgbClr val="808080"/>
+                </a:solidFill>
+                <a:latin typeface="Calibri"/>
+                <a:ea typeface="Microsoft YaHei"/>
+                <a:cs typeface="Microsoft YaHei"/>
+              </a:rPr>
+              <a:t>TODOS.md; docs/DESIGN_REVIEW_4_1_RELEASE.md — classified as known upstream limitation, not a bug</a:t>
+            </a:r>
+          </a:p>
+        </p:txBody>
+      </p:sp>
+      <p:sp>
+        <p:nvSpPr>
+          <p:cNvPr id="24" name="TextBox 23"/>
+          <p:cNvSpPr txBox="1"/>
+          <p:nvPr/>
+        </p:nvSpPr>
+        <p:spPr>
+          <a:xfrm>
+            <a:off x="10591495" y="6355080"/>
+            <a:ext cx="914400" cy="274320"/>
+          </a:xfrm>
+          <a:prstGeom prst="rect">
+            <a:avLst/>
+          </a:prstGeom>
+          <a:noFill/>
+        </p:spPr>
+        <p:txBody>
+          <a:bodyPr wrap="square" anchor="t" lIns="0" rIns="0" tIns="0" bIns="0">
+            <a:noAutofit/>
+          </a:bodyPr>
+          <a:lstStyle/>
+          <a:p>
+            <a:pPr algn="l"/>
+            <a:r>
+              <a:rPr sz="1200" b="0" i="0">
+                <a:solidFill>
+                  <a:srgbClr val="808080"/>
+                </a:solidFill>
+                <a:latin typeface="Calibri"/>
+                <a:ea typeface="Microsoft YaHei"/>
+                <a:cs typeface="Microsoft YaHei"/>
+              </a:rPr>
+              <a:t>21</a:t>
+            </a:r>
+          </a:p>
+        </p:txBody>
+      </p:sp>
+    </p:spTree>
+  </p:cSld>
+  <p:clrMapOvr>
+    <a:masterClrMapping/>
+  </p:clrMapOvr>
+</p:sld>
+</file>
+
+<file path=ppt/slides/slide23.xml><?xml version="1.0" encoding="utf-8"?>
+<p:sld xmlns:a="http://schemas.openxmlformats.org/drawingml/2006/main" xmlns:p="http://schemas.openxmlformats.org/presentationml/2006/main" xmlns:r="http://schemas.openxmlformats.org/officeDocument/2006/relationships">
+  <p:cSld>
+    <p:spTree>
+      <p:nvGrpSpPr>
+        <p:cNvPr id="1" name=""/>
+        <p:cNvGrpSpPr/>
+        <p:nvPr/>
+      </p:nvGrpSpPr>
+      <p:grpSpPr/>
+      <p:sp>
+        <p:nvSpPr>
+          <p:cNvPr id="2" name="Rectangle 1"/>
+          <p:cNvSpPr/>
+          <p:nvPr/>
+        </p:nvSpPr>
+        <p:spPr>
+          <a:xfrm>
+            <a:off x="0" y="0"/>
+            <a:ext cx="12191695" cy="6858000"/>
+          </a:xfrm>
+          <a:prstGeom prst="rect">
+            <a:avLst/>
+          </a:prstGeom>
+          <a:solidFill>
+            <a:srgbClr val="143552"/>
+          </a:solidFill>
+          <a:ln>
+            <a:noFill/>
+          </a:ln>
+          <a:effectLst/>
+        </p:spPr>
+        <p:style>
+          <a:lnRef idx="1">
+            <a:schemeClr val="accent1"/>
+          </a:lnRef>
+          <a:fillRef idx="3">
+            <a:schemeClr val="accent1"/>
+          </a:fillRef>
+          <a:effectRef idx="2">
+            <a:schemeClr val="accent1"/>
+          </a:effectRef>
+          <a:fontRef idx="minor">
+            <a:schemeClr val="lt1"/>
+          </a:fontRef>
+        </p:style>
+        <p:txBody>
+          <a:bodyPr rtlCol="0" anchor="ctr"/>
+          <a:lstStyle/>
+          <a:p>
+            <a:pPr algn="ctr"/>
+          </a:p>
+        </p:txBody>
+      </p:sp>
+      <p:sp>
+        <p:nvSpPr>
+          <p:cNvPr id="3" name="Rectangle 2"/>
+          <p:cNvSpPr/>
+          <p:nvPr/>
+        </p:nvSpPr>
+        <p:spPr>
+          <a:xfrm>
+            <a:off x="685800" y="2103120"/>
+            <a:ext cx="54864" cy="2377440"/>
+          </a:xfrm>
+          <a:prstGeom prst="rect">
+            <a:avLst/>
+          </a:prstGeom>
+          <a:solidFill>
+            <a:srgbClr val="00A6C9"/>
+          </a:solidFill>
+          <a:ln>
+            <a:noFill/>
+          </a:ln>
+          <a:effectLst/>
+        </p:spPr>
+        <p:style>
+          <a:lnRef idx="1">
+            <a:schemeClr val="accent1"/>
+          </a:lnRef>
+          <a:fillRef idx="3">
+            <a:schemeClr val="accent1"/>
+          </a:fillRef>
+          <a:effectRef idx="2">
+            <a:schemeClr val="accent1"/>
+          </a:effectRef>
+          <a:fontRef idx="minor">
+            <a:schemeClr val="lt1"/>
+          </a:fontRef>
+        </p:style>
+        <p:txBody>
+          <a:bodyPr rtlCol="0" anchor="ctr"/>
+          <a:lstStyle/>
+          <a:p>
+            <a:pPr algn="ctr"/>
+          </a:p>
+        </p:txBody>
+      </p:sp>
+      <p:sp>
+        <p:nvSpPr>
+          <p:cNvPr id="4" name="TextBox 3"/>
+          <p:cNvSpPr txBox="1"/>
+          <p:nvPr/>
+        </p:nvSpPr>
+        <p:spPr>
+          <a:xfrm>
+            <a:off x="1143000" y="1691640"/>
+            <a:ext cx="9601200" cy="320040"/>
+          </a:xfrm>
+          <a:prstGeom prst="rect">
+            <a:avLst/>
+          </a:prstGeom>
+          <a:noFill/>
+        </p:spPr>
+        <p:txBody>
+          <a:bodyPr wrap="square" anchor="t" lIns="0" rIns="0" tIns="0" bIns="0">
+            <a:noAutofit/>
+          </a:bodyPr>
+          <a:lstStyle/>
+          <a:p>
+            <a:pPr algn="l"/>
+            <a:r>
+              <a:rPr sz="1600" b="1" i="0">
+                <a:solidFill>
+                  <a:srgbClr val="7FC4E8"/>
+                </a:solidFill>
+                <a:latin typeface="Calibri"/>
+                <a:ea typeface="Microsoft YaHei"/>
+                <a:cs typeface="Microsoft YaHei"/>
+              </a:rPr>
+              <a:t>TUTORIAL 4.1 — THE WRONG HYPOTHESIS, KILLED FAST</a:t>
+            </a:r>
+          </a:p>
+        </p:txBody>
+      </p:sp>
+      <p:sp>
+        <p:nvSpPr>
+          <p:cNvPr id="5" name="TextBox 4"/>
+          <p:cNvSpPr txBox="1"/>
+          <p:nvPr/>
+        </p:nvSpPr>
+        <p:spPr>
+          <a:xfrm>
+            <a:off x="1143000" y="2148840"/>
+            <a:ext cx="9692640" cy="2348991"/>
+          </a:xfrm>
+          <a:prstGeom prst="rect">
+            <a:avLst/>
+          </a:prstGeom>
+          <a:noFill/>
+        </p:spPr>
+        <p:txBody>
+          <a:bodyPr wrap="square" anchor="t" lIns="0" rIns="0" tIns="0" bIns="0">
+            <a:noAutofit/>
+          </a:bodyPr>
+          <a:lstStyle/>
+          <a:p>
+            <a:pPr algn="l">
+              <a:lnSpc>
+                <a:spcPct val="130000"/>
+              </a:lnSpc>
+            </a:pPr>
+            <a:r>
+              <a:rPr sz="3200" b="1" i="0">
+                <a:solidFill>
+                  <a:srgbClr val="FFFFFF"/>
+                </a:solidFill>
+                <a:latin typeface="Calibri"/>
+                <a:ea typeface="Microsoft YaHei"/>
+                <a:cs typeface="Microsoft YaHei"/>
+              </a:rPr>
+              <a:t>1x, 2x, and 3x all failed at the identical ~8.2-second mark.
+A real size problem fails later at 1x than at 3x.
+Identical timing didn't weakly suggest — it disproved the hypothesis.</a:t>
+            </a:r>
+          </a:p>
+        </p:txBody>
+      </p:sp>
+      <p:sp>
+        <p:nvSpPr>
+          <p:cNvPr id="6" name="TextBox 5"/>
+          <p:cNvSpPr txBox="1"/>
+          <p:nvPr/>
+        </p:nvSpPr>
+        <p:spPr>
+          <a:xfrm>
+            <a:off x="1143000" y="4663440"/>
+            <a:ext cx="9692640" cy="457200"/>
+          </a:xfrm>
+          <a:prstGeom prst="rect">
+            <a:avLst/>
+          </a:prstGeom>
+          <a:noFill/>
+        </p:spPr>
+        <p:txBody>
+          <a:bodyPr wrap="square" anchor="t" lIns="0" rIns="0" tIns="0" bIns="0">
+            <a:noAutofit/>
+          </a:bodyPr>
+          <a:lstStyle/>
+          <a:p>
+            <a:pPr algn="l"/>
+            <a:r>
+              <a:rPr sz="1600" b="0" i="0">
+                <a:solidFill>
+                  <a:srgbClr val="9AA8B4"/>
+                </a:solidFill>
+                <a:latin typeface="Calibri"/>
+                <a:ea typeface="Microsoft YaHei"/>
+                <a:cs typeface="Microsoft YaHei"/>
+              </a:rPr>
+              <a:t>Real cause: modern-screenshot awaits a `seeked` event a never-played video will never fire. Fix: swap &lt;video&gt; for its poster on an off-screen clone, before the library ever sees it. src/lib/export-image.ts</a:t>
+            </a:r>
+          </a:p>
+        </p:txBody>
+      </p:sp>
+      <p:sp>
+        <p:nvSpPr>
+          <p:cNvPr id="7" name="TextBox 6"/>
+          <p:cNvSpPr txBox="1"/>
+          <p:nvPr/>
+        </p:nvSpPr>
+        <p:spPr>
+          <a:xfrm>
+            <a:off x="10591495" y="6355080"/>
+            <a:ext cx="914400" cy="274320"/>
+          </a:xfrm>
+          <a:prstGeom prst="rect">
+            <a:avLst/>
+          </a:prstGeom>
+          <a:noFill/>
+        </p:spPr>
+        <p:txBody>
+          <a:bodyPr wrap="square" anchor="t" lIns="0" rIns="0" tIns="0" bIns="0">
+            <a:noAutofit/>
+          </a:bodyPr>
+          <a:lstStyle/>
+          <a:p>
+            <a:pPr algn="l"/>
+            <a:r>
+              <a:rPr sz="1200" b="0" i="0">
+                <a:solidFill>
+                  <a:srgbClr val="9AA8B4"/>
+                </a:solidFill>
+                <a:latin typeface="Calibri"/>
+                <a:ea typeface="Microsoft YaHei"/>
+                <a:cs typeface="Microsoft YaHei"/>
+              </a:rPr>
+              <a:t>22</a:t>
+            </a:r>
+          </a:p>
+        </p:txBody>
+      </p:sp>
+    </p:spTree>
+  </p:cSld>
+  <p:clrMapOvr>
+    <a:masterClrMapping/>
+  </p:clrMapOvr>
+</p:sld>
+</file>
+
+<file path=ppt/slides/slide24.xml><?xml version="1.0" encoding="utf-8"?>
+<p:sld xmlns:a="http://schemas.openxmlformats.org/drawingml/2006/main" xmlns:p="http://schemas.openxmlformats.org/presentationml/2006/main" xmlns:r="http://schemas.openxmlformats.org/officeDocument/2006/relationships">
+  <p:cSld>
+    <p:spTree>
+      <p:nvGrpSpPr>
+        <p:cNvPr id="1" name=""/>
+        <p:cNvGrpSpPr/>
+        <p:nvPr/>
+      </p:nvGrpSpPr>
+      <p:grpSpPr/>
+      <p:sp>
+        <p:nvSpPr>
+          <p:cNvPr id="2" name="TextBox 1"/>
+          <p:cNvSpPr txBox="1"/>
+          <p:nvPr/>
+        </p:nvSpPr>
+        <p:spPr>
+          <a:xfrm>
+            <a:off x="685800" y="457200"/>
+            <a:ext cx="10820095" cy="274320"/>
+          </a:xfrm>
+          <a:prstGeom prst="rect">
+            <a:avLst/>
+          </a:prstGeom>
+          <a:noFill/>
+        </p:spPr>
+        <p:txBody>
+          <a:bodyPr wrap="square" anchor="t" lIns="0" rIns="0" tIns="0" bIns="0">
+            <a:noAutofit/>
+          </a:bodyPr>
+          <a:lstStyle/>
+          <a:p>
+            <a:pPr algn="l"/>
+            <a:r>
+              <a:rPr sz="1600" b="1" i="0">
+                <a:solidFill>
+                  <a:srgbClr val="1F4E78"/>
+                </a:solidFill>
+                <a:latin typeface="Calibri"/>
+                <a:ea typeface="Microsoft YaHei"/>
+                <a:cs typeface="Microsoft YaHei"/>
+              </a:rPr>
+              <a:t>TUTORIAL 4.1 — THE HUMAN EVIDENCE LADDER, EXTENDED</a:t>
+            </a:r>
+          </a:p>
+        </p:txBody>
+      </p:sp>
+      <p:sp>
+        <p:nvSpPr>
+          <p:cNvPr id="3" name="TextBox 2"/>
+          <p:cNvSpPr txBox="1"/>
+          <p:nvPr/>
+        </p:nvSpPr>
+        <p:spPr>
+          <a:xfrm>
+            <a:off x="685800" y="786384"/>
+            <a:ext cx="10820095" cy="1037335"/>
+          </a:xfrm>
+          <a:prstGeom prst="rect">
+            <a:avLst/>
+          </a:prstGeom>
+          <a:noFill/>
+        </p:spPr>
+        <p:txBody>
+          <a:bodyPr wrap="square" anchor="t" lIns="0" rIns="0" tIns="0" bIns="0">
+            <a:noAutofit/>
+          </a:bodyPr>
+          <a:lstStyle/>
+          <a:p>
+            <a:pPr algn="l">
+              <a:lnSpc>
+                <a:spcPct val="108000"/>
+              </a:lnSpc>
+            </a:pPr>
+            <a:r>
+              <a:rPr sz="3200" b="1" i="0">
+                <a:solidFill>
+                  <a:srgbClr val="1F4E78"/>
+                </a:solidFill>
+                <a:latin typeface="Calibri"/>
+                <a:ea typeface="Microsoft YaHei"/>
+                <a:cs typeface="Microsoft YaHei"/>
+              </a:rPr>
+              <a:t>“The promise resolved” and “a human pasted it and looked” are different claims</a:t>
+            </a:r>
+          </a:p>
+        </p:txBody>
+      </p:sp>
+      <p:sp>
+        <p:nvSpPr>
+          <p:cNvPr id="4" name="Rectangle 3"/>
+          <p:cNvSpPr/>
+          <p:nvPr/>
+        </p:nvSpPr>
+        <p:spPr>
+          <a:xfrm>
+            <a:off x="685800" y="1933447"/>
+            <a:ext cx="10820095" cy="9525"/>
+          </a:xfrm>
+          <a:prstGeom prst="rect">
+            <a:avLst/>
+          </a:prstGeom>
+          <a:solidFill>
+            <a:srgbClr val="1F4E78"/>
+          </a:solidFill>
+          <a:ln>
+            <a:noFill/>
+          </a:ln>
+          <a:effectLst/>
+        </p:spPr>
+        <p:style>
+          <a:lnRef idx="1">
+            <a:schemeClr val="accent1"/>
+          </a:lnRef>
+          <a:fillRef idx="3">
+            <a:schemeClr val="accent1"/>
+          </a:fillRef>
+          <a:effectRef idx="2">
+            <a:schemeClr val="accent1"/>
+          </a:effectRef>
+          <a:fontRef idx="minor">
+            <a:schemeClr val="lt1"/>
+          </a:fontRef>
+        </p:style>
+        <p:txBody>
+          <a:bodyPr rtlCol="0" anchor="ctr"/>
+          <a:lstStyle/>
+          <a:p>
+            <a:pPr algn="ctr"/>
+          </a:p>
+        </p:txBody>
+      </p:sp>
+      <p:sp>
+        <p:nvSpPr>
+          <p:cNvPr id="5" name="Rectangle 4"/>
+          <p:cNvSpPr/>
+          <p:nvPr/>
+        </p:nvSpPr>
+        <p:spPr>
+          <a:xfrm>
+            <a:off x="704088" y="2205481"/>
+            <a:ext cx="82296" cy="82296"/>
+          </a:xfrm>
+          <a:prstGeom prst="rect">
+            <a:avLst/>
+          </a:prstGeom>
+          <a:solidFill>
+            <a:srgbClr val="1F4E78"/>
+          </a:solidFill>
+          <a:ln>
+            <a:noFill/>
+          </a:ln>
+          <a:effectLst/>
+        </p:spPr>
+        <p:style>
+          <a:lnRef idx="1">
+            <a:schemeClr val="accent1"/>
+          </a:lnRef>
+          <a:fillRef idx="3">
+            <a:schemeClr val="accent1"/>
+          </a:fillRef>
+          <a:effectRef idx="2">
+            <a:schemeClr val="accent1"/>
+          </a:effectRef>
+          <a:fontRef idx="minor">
+            <a:schemeClr val="lt1"/>
+          </a:fontRef>
+        </p:style>
+        <p:txBody>
+          <a:bodyPr rtlCol="0" anchor="ctr"/>
+          <a:lstStyle/>
+          <a:p>
+            <a:pPr algn="ctr"/>
+          </a:p>
+        </p:txBody>
+      </p:sp>
+      <p:sp>
+        <p:nvSpPr>
+          <p:cNvPr id="6" name="TextBox 5"/>
+          <p:cNvSpPr txBox="1"/>
+          <p:nvPr/>
+        </p:nvSpPr>
+        <p:spPr>
+          <a:xfrm>
+            <a:off x="978408" y="2079751"/>
+            <a:ext cx="10527487" cy="1077468"/>
+          </a:xfrm>
+          <a:prstGeom prst="rect">
+            <a:avLst/>
+          </a:prstGeom>
+          <a:noFill/>
+        </p:spPr>
+        <p:txBody>
+          <a:bodyPr wrap="square" anchor="t" lIns="0" rIns="0" tIns="0" bIns="0">
+            <a:noAutofit/>
+          </a:bodyPr>
+          <a:lstStyle/>
+          <a:p>
+            <a:pPr algn="l">
+              <a:lnSpc>
+                <a:spcPct val="122000"/>
+              </a:lnSpc>
+            </a:pPr>
+            <a:r>
+              <a:rPr sz="2200" b="1" i="0">
+                <a:solidFill>
+                  <a:srgbClr val="1F4E78"/>
+                </a:solidFill>
+                <a:latin typeface="Calibri"/>
+                <a:ea typeface="Microsoft YaHei"/>
+                <a:cs typeface="Microsoft YaHei"/>
+              </a:rPr>
+              <a:t>Printed before export.  </a:t>
+            </a:r>
+            <a:r>
+              <a:rPr sz="2200" b="0" i="0">
+                <a:solidFill>
+                  <a:srgbClr val="000000"/>
+                </a:solidFill>
+                <a:latin typeface="Calibri"/>
+                <a:ea typeface="Microsoft YaHei"/>
+                <a:cs typeface="Microsoft YaHei"/>
+              </a:rPr>
+              <a:t>A PDF of the thread page, captured before the export attempt, proved the DOM had rendered correctly — independent of what export did next.</a:t>
+            </a:r>
+          </a:p>
+        </p:txBody>
+      </p:sp>
+      <p:sp>
+        <p:nvSpPr>
+          <p:cNvPr id="7" name="Rectangle 6"/>
+          <p:cNvSpPr/>
+          <p:nvPr/>
+        </p:nvSpPr>
+        <p:spPr>
+          <a:xfrm>
+            <a:off x="704088" y="3410965"/>
+            <a:ext cx="82296" cy="82296"/>
+          </a:xfrm>
+          <a:prstGeom prst="rect">
+            <a:avLst/>
+          </a:prstGeom>
+          <a:solidFill>
+            <a:srgbClr val="1F4E78"/>
+          </a:solidFill>
+          <a:ln>
+            <a:noFill/>
+          </a:ln>
+          <a:effectLst/>
+        </p:spPr>
+        <p:style>
+          <a:lnRef idx="1">
+            <a:schemeClr val="accent1"/>
+          </a:lnRef>
+          <a:fillRef idx="3">
+            <a:schemeClr val="accent1"/>
+          </a:fillRef>
+          <a:effectRef idx="2">
+            <a:schemeClr val="accent1"/>
+          </a:effectRef>
+          <a:fontRef idx="minor">
+            <a:schemeClr val="lt1"/>
+          </a:fontRef>
+        </p:style>
+        <p:txBody>
+          <a:bodyPr rtlCol="0" anchor="ctr"/>
+          <a:lstStyle/>
+          <a:p>
+            <a:pPr algn="ctr"/>
+          </a:p>
+        </p:txBody>
+      </p:sp>
+      <p:sp>
+        <p:nvSpPr>
+          <p:cNvPr id="8" name="TextBox 7"/>
+          <p:cNvSpPr txBox="1"/>
+          <p:nvPr/>
+        </p:nvSpPr>
+        <p:spPr>
+          <a:xfrm>
+            <a:off x="978408" y="3285235"/>
+            <a:ext cx="10527487" cy="736600"/>
+          </a:xfrm>
+          <a:prstGeom prst="rect">
+            <a:avLst/>
+          </a:prstGeom>
+          <a:noFill/>
+        </p:spPr>
+        <p:txBody>
+          <a:bodyPr wrap="square" anchor="t" lIns="0" rIns="0" tIns="0" bIns="0">
+            <a:noAutofit/>
+          </a:bodyPr>
+          <a:lstStyle/>
+          <a:p>
+            <a:pPr algn="l">
+              <a:lnSpc>
+                <a:spcPct val="122000"/>
+              </a:lnSpc>
+            </a:pPr>
+            <a:r>
+              <a:rPr sz="2200" b="1" i="0">
+                <a:solidFill>
+                  <a:srgbClr val="1F4E78"/>
+                </a:solidFill>
+                <a:latin typeface="Calibri"/>
+                <a:ea typeface="Microsoft YaHei"/>
+                <a:cs typeface="Microsoft YaHei"/>
+              </a:rPr>
+              <a:t>Production, not just local.  </a:t>
+            </a:r>
+            <a:r>
+              <a:rPr sz="2200" b="0" i="0">
+                <a:solidFill>
+                  <a:srgbClr val="000000"/>
+                </a:solidFill>
+                <a:latin typeface="Calibri"/>
+                <a:ea typeface="Microsoft YaHei"/>
+                <a:cs typeface="Microsoft YaHei"/>
+              </a:rPr>
+              <a:t>Download PNG and Copy image were both re-run against the live deployed URL after the fix, not only on localhost.</a:t>
+            </a:r>
+          </a:p>
+        </p:txBody>
+      </p:sp>
+      <p:sp>
+        <p:nvSpPr>
+          <p:cNvPr id="9" name="Rectangle 8"/>
+          <p:cNvSpPr/>
+          <p:nvPr/>
+        </p:nvSpPr>
+        <p:spPr>
+          <a:xfrm>
+            <a:off x="704088" y="4275581"/>
+            <a:ext cx="82296" cy="82296"/>
+          </a:xfrm>
+          <a:prstGeom prst="rect">
+            <a:avLst/>
+          </a:prstGeom>
+          <a:solidFill>
+            <a:srgbClr val="1F4E78"/>
+          </a:solidFill>
+          <a:ln>
+            <a:noFill/>
+          </a:ln>
+          <a:effectLst/>
+        </p:spPr>
+        <p:style>
+          <a:lnRef idx="1">
+            <a:schemeClr val="accent1"/>
+          </a:lnRef>
+          <a:fillRef idx="3">
+            <a:schemeClr val="accent1"/>
+          </a:fillRef>
+          <a:effectRef idx="2">
+            <a:schemeClr val="accent1"/>
+          </a:effectRef>
+          <a:fontRef idx="minor">
+            <a:schemeClr val="lt1"/>
+          </a:fontRef>
+        </p:style>
+        <p:txBody>
+          <a:bodyPr rtlCol="0" anchor="ctr"/>
+          <a:lstStyle/>
+          <a:p>
+            <a:pPr algn="ctr"/>
+          </a:p>
+        </p:txBody>
+      </p:sp>
+      <p:sp>
+        <p:nvSpPr>
+          <p:cNvPr id="10" name="TextBox 9"/>
+          <p:cNvSpPr txBox="1"/>
+          <p:nvPr/>
+        </p:nvSpPr>
+        <p:spPr>
+          <a:xfrm>
+            <a:off x="978408" y="4149851"/>
+            <a:ext cx="10527487" cy="1077468"/>
+          </a:xfrm>
+          <a:prstGeom prst="rect">
+            <a:avLst/>
+          </a:prstGeom>
+          <a:noFill/>
+        </p:spPr>
+        <p:txBody>
+          <a:bodyPr wrap="square" anchor="t" lIns="0" rIns="0" tIns="0" bIns="0">
+            <a:noAutofit/>
+          </a:bodyPr>
+          <a:lstStyle/>
+          <a:p>
+            <a:pPr algn="l">
+              <a:lnSpc>
+                <a:spcPct val="122000"/>
+              </a:lnSpc>
+            </a:pPr>
+            <a:r>
+              <a:rPr sz="2200" b="1" i="0">
+                <a:solidFill>
+                  <a:srgbClr val="1F4E78"/>
+                </a:solidFill>
+                <a:latin typeface="Calibri"/>
+                <a:ea typeface="Microsoft YaHei"/>
+                <a:cs typeface="Microsoft YaHei"/>
+              </a:rPr>
+              <a:t>Cross-application, by hand.  </a:t>
+            </a:r>
+            <a:r>
+              <a:rPr sz="2200" b="0" i="0">
+                <a:solidFill>
+                  <a:srgbClr val="000000"/>
+                </a:solidFill>
+                <a:latin typeface="Calibri"/>
+                <a:ea typeface="Microsoft YaHei"/>
+                <a:cs typeface="Microsoft YaHei"/>
+              </a:rPr>
+              <a:t>The copied image was pasted into Windows 11 Paint and visually confirmed — closing a clipboard claim left unverified since the original tutorial.</a:t>
+            </a:r>
+          </a:p>
+        </p:txBody>
+      </p:sp>
+      <p:sp>
+        <p:nvSpPr>
+          <p:cNvPr id="11" name="Rectangle 10"/>
+          <p:cNvSpPr/>
+          <p:nvPr/>
+        </p:nvSpPr>
+        <p:spPr>
+          <a:xfrm>
+            <a:off x="704088" y="5481065"/>
+            <a:ext cx="82296" cy="82296"/>
+          </a:xfrm>
+          <a:prstGeom prst="rect">
+            <a:avLst/>
+          </a:prstGeom>
+          <a:solidFill>
+            <a:srgbClr val="1F4E78"/>
+          </a:solidFill>
+          <a:ln>
+            <a:noFill/>
+          </a:ln>
+          <a:effectLst/>
+        </p:spPr>
+        <p:style>
+          <a:lnRef idx="1">
+            <a:schemeClr val="accent1"/>
+          </a:lnRef>
+          <a:fillRef idx="3">
+            <a:schemeClr val="accent1"/>
+          </a:fillRef>
+          <a:effectRef idx="2">
+            <a:schemeClr val="accent1"/>
+          </a:effectRef>
+          <a:fontRef idx="minor">
+            <a:schemeClr val="lt1"/>
+          </a:fontRef>
+        </p:style>
+        <p:txBody>
+          <a:bodyPr rtlCol="0" anchor="ctr"/>
+          <a:lstStyle/>
+          <a:p>
+            <a:pPr algn="ctr"/>
+          </a:p>
+        </p:txBody>
+      </p:sp>
+      <p:sp>
+        <p:nvSpPr>
+          <p:cNvPr id="12" name="TextBox 11"/>
+          <p:cNvSpPr txBox="1"/>
+          <p:nvPr/>
+        </p:nvSpPr>
+        <p:spPr>
+          <a:xfrm>
+            <a:off x="978408" y="5355335"/>
+            <a:ext cx="10527487" cy="1077468"/>
+          </a:xfrm>
+          <a:prstGeom prst="rect">
+            <a:avLst/>
+          </a:prstGeom>
+          <a:noFill/>
+        </p:spPr>
+        <p:txBody>
+          <a:bodyPr wrap="square" anchor="t" lIns="0" rIns="0" tIns="0" bIns="0">
+            <a:noAutofit/>
+          </a:bodyPr>
+          <a:lstStyle/>
+          <a:p>
+            <a:pPr algn="l">
+              <a:lnSpc>
+                <a:spcPct val="122000"/>
+              </a:lnSpc>
+            </a:pPr>
+            <a:r>
+              <a:rPr sz="2200" b="1" i="0">
+                <a:solidFill>
+                  <a:srgbClr val="1F4E78"/>
+                </a:solidFill>
+                <a:latin typeface="Calibri"/>
+                <a:ea typeface="Microsoft YaHei"/>
+                <a:cs typeface="Microsoft YaHei"/>
+              </a:rPr>
+              <a:t>Still no AI substitute.  </a:t>
+            </a:r>
+            <a:r>
+              <a:rPr sz="2200" b="0" i="0">
+                <a:solidFill>
+                  <a:srgbClr val="000000"/>
+                </a:solidFill>
+                <a:latin typeface="Calibri"/>
+                <a:ea typeface="Microsoft YaHei"/>
+                <a:cs typeface="Microsoft YaHei"/>
+              </a:rPr>
+              <a:t>No automated check in this project's history could have formulated either of Tutorial 4.1's two bugs — a human found both.</a:t>
+            </a:r>
+          </a:p>
+        </p:txBody>
+      </p:sp>
+      <p:sp>
+        <p:nvSpPr>
+          <p:cNvPr id="13" name="TextBox 12"/>
+          <p:cNvSpPr txBox="1"/>
+          <p:nvPr/>
+        </p:nvSpPr>
+        <p:spPr>
+          <a:xfrm>
+            <a:off x="685800" y="6355080"/>
+            <a:ext cx="9601200" cy="274320"/>
+          </a:xfrm>
+          <a:prstGeom prst="rect">
+            <a:avLst/>
+          </a:prstGeom>
+          <a:noFill/>
+        </p:spPr>
+        <p:txBody>
+          <a:bodyPr wrap="square" anchor="t" lIns="0" rIns="0" tIns="0" bIns="0">
+            <a:noAutofit/>
+          </a:bodyPr>
+          <a:lstStyle/>
+          <a:p>
+            <a:pPr algn="l"/>
+            <a:r>
+              <a:rPr sz="1200" b="0" i="1">
+                <a:solidFill>
+                  <a:srgbClr val="808080"/>
+                </a:solidFill>
+                <a:latin typeface="Calibri"/>
+                <a:ea typeface="Microsoft YaHei"/>
+                <a:cs typeface="Microsoft YaHei"/>
+              </a:rPr>
+              <a:t>docs/DESIGN_REVIEW_4_1_RELEASE.md — human manual verification</a:t>
+            </a:r>
+          </a:p>
+        </p:txBody>
+      </p:sp>
+      <p:sp>
+        <p:nvSpPr>
+          <p:cNvPr id="14" name="TextBox 13"/>
+          <p:cNvSpPr txBox="1"/>
+          <p:nvPr/>
+        </p:nvSpPr>
+        <p:spPr>
+          <a:xfrm>
+            <a:off x="10591495" y="6355080"/>
+            <a:ext cx="914400" cy="274320"/>
+          </a:xfrm>
+          <a:prstGeom prst="rect">
+            <a:avLst/>
+          </a:prstGeom>
+          <a:noFill/>
+        </p:spPr>
+        <p:txBody>
+          <a:bodyPr wrap="square" anchor="t" lIns="0" rIns="0" tIns="0" bIns="0">
+            <a:noAutofit/>
+          </a:bodyPr>
+          <a:lstStyle/>
+          <a:p>
+            <a:pPr algn="l"/>
+            <a:r>
+              <a:rPr sz="1200" b="0" i="0">
+                <a:solidFill>
+                  <a:srgbClr val="808080"/>
+                </a:solidFill>
+                <a:latin typeface="Calibri"/>
+                <a:ea typeface="Microsoft YaHei"/>
+                <a:cs typeface="Microsoft YaHei"/>
+              </a:rPr>
+              <a:t>23</a:t>
             </a:r>
           </a:p>
         </p:txBody>
